--- a/decks/hist-slave-trade/hist-slave-trade_ch2_triangle.pptx
+++ b/decks/hist-slave-trade/hist-slave-trade_ch2_triangle.pptx
@@ -125,30 +125,30 @@
   <p:extLst>
     <p:ext uri="{521415D9-36F7-43E2-AB2F-B90AF26B5E84}">
       <p14:sectionLst xmlns:p14="http://schemas.microsoft.com/office/powerpoint/2010/main">
-        <p14:section name="Opening" id="{0f302db3-39b9-78a9-c3ce-3cf041ec2221}">
+        <p14:section name="Opening" id="{bc24c6fa-8c4c-21eb-6558-4178f5e65c25}">
           <p14:sldIdLst>
             <p14:sldId id="256"/>
           </p14:sldIdLst>
         </p14:section>
-        <p14:section name="Gate" id="{079537c3-cd27-6353-2be9-59eef6053ce9}">
+        <p14:section name="Gate" id="{b4e61d27-28f8-fb91-5f35-7230249b9c33}">
           <p14:sldIdLst>
             <p14:sldId id="257"/>
             <p14:sldId id="258"/>
           </p14:sldIdLst>
         </p14:section>
-        <p14:section name="Pre-teach" id="{e8b0ce7a-a895-52a3-ce15-461f2bc97bba}">
+        <p14:section name="Pre-teach" id="{c5090899-8409-618c-8728-d3312cbc3fba}">
           <p14:sldIdLst>
             <p14:sldId id="259"/>
             <p14:sldId id="260"/>
           </p14:sldIdLst>
         </p14:section>
-        <p14:section name="Read-along" id="{50f3aefe-7955-bebf-185f-459e786a8840}">
+        <p14:section name="Read-along" id="{65fb9cf0-27aa-5747-2804-a03fd16dd3d4}">
           <p14:sldIdLst>
             <p14:sldId id="261"/>
             <p14:sldId id="262"/>
           </p14:sldIdLst>
         </p14:section>
-        <p14:section name="Teach" id="{7313c8de-7d54-3c4a-1c21-52cb2d33263f}">
+        <p14:section name="Teach" id="{8a664b66-8590-cd62-2714-ab7d04e39f25}">
           <p14:sldIdLst>
             <p14:sldId id="263"/>
             <p14:sldId id="264"/>
@@ -156,7 +156,7 @@
             <p14:sldId id="266"/>
           </p14:sldIdLst>
         </p14:section>
-        <p14:section name="Routes" id="{4a639ce4-1397-b5e3-eb3b-856ac678abeb}">
+        <p14:section name="Routes" id="{31d57922-43b2-70f1-5036-6645072acd02}">
           <p14:sldIdLst>
             <p14:sldId id="267"/>
             <p14:sldId id="268"/>
@@ -164,12 +164,12 @@
             <p14:sldId id="270"/>
           </p14:sldIdLst>
         </p14:section>
-        <p14:section name="Close" id="{e422386a-a0be-c61b-7b24-013ff2845d11}">
+        <p14:section name="Close" id="{37e8d6b7-0e0f-0f69-d7ef-c31eb3fdd5dc}">
           <p14:sldIdLst>
             <p14:sldId id="271"/>
           </p14:sldIdLst>
         </p14:section>
-        <p14:section name="Answers" id="{8d675a14-de0a-0230-81ea-d08954d8b887}">
+        <p14:section name="Answers" id="{9749ea69-c9d7-4390-3fd7-d8e51f5cb6d6}">
           <p14:sldIdLst>
             <p14:sldId id="272"/>
             <p14:sldId id="273"/>
@@ -1599,8 +1599,8 @@
               <a:rPr lang="en-US" dirty="0"/>
               <a:t>Do now — retrieval. Silent, no notes, no help: recall comes before any support. Give about four minutes.
 1. The second leg of the triangle, from West Africa to the Americas, was called the ___.  →  Middle Passage
-2. What did ships carry on the outward journey from Europe to West Africa?  →  A   Guns, cloth and other manufactured goods
-3. Which British port sent the most slave-trading voyages?  →  A   Liverpool
+2. What did ships carry on the outward journey from Europe to West Africa?  →  D   Guns, cloth and other manufactured goods
+3. Which British port sent the most slave-trading voyages?  →  B   Liverpool
 Circulate: who gets 3/3 (Stretch route), 2/3 (Core), 0–1 (Support)? Use this to route pupils later in the lesson.</a:t>
             </a:r>
             <a:endParaRPr lang="en-US" dirty="0"/>
@@ -1691,8 +1691,8 @@
               <a:rPr lang="en-US" dirty="0"/>
               <a:t>Answers — pupils mark their own in a different colour, then hands up for 3/3, 2/3, 1/3.
 1. Middle Passage. The Middle Passage is the second leg, on which enslaved people were carried from West Africa to the Americas.
-2. A   Guns, cloth and other manufactured goods. Ships left Europe with manufactured goods, especially guns and cloth, to trade for enslaved people on the African coast.
-3. A   Liverpool. Liverpool sent about 5,300 voyages, far more than London's 3,100.
+2. D   Guns, cloth and other manufactured goods. Ships left Europe with manufactured goods, especially guns and cloth, to trade for enslaved people on the African coast.
+3. B   Liverpool. Liverpool sent about 5,300 voyages, far more than London's 3,100.
 Say the route each score points to: 3/3 Stretch, 2/3 Core, 0–1 Support. Pupils may choose to move up.</a:t>
             </a:r>
             <a:endParaRPr lang="en-US" dirty="0"/>
@@ -7897,7 +7897,7 @@
                 <a:ea typeface="Calibri" pitchFamily="34" charset="-122"/>
                 <a:cs typeface="Calibri" pitchFamily="34" charset="-120"/>
               </a:rPr>
-              <a:t>The outward journey</a:t>
+              <a:t>The Middle Passage</a:t>
             </a:r>
             <a:endParaRPr lang="en-US" sz="2600" dirty="0"/>
           </a:p>
@@ -7934,7 +7934,7 @@
                 <a:ea typeface="Calibri" pitchFamily="34" charset="-122"/>
                 <a:cs typeface="Calibri" pitchFamily="34" charset="-120"/>
               </a:rPr>
-              <a:t>The Middle Passage</a:t>
+              <a:t>The outward journey</a:t>
             </a:r>
             <a:endParaRPr lang="en-US" sz="2600" dirty="0"/>
           </a:p>
@@ -11535,7 +11535,7 @@
                 <a:ea typeface="Calibri" pitchFamily="34" charset="-122"/>
                 <a:cs typeface="Calibri" pitchFamily="34" charset="-120"/>
               </a:rPr>
-              <a:t>Guns, cloth and other manufactured goods</a:t>
+              <a:t>Gold and diamonds from India</a:t>
             </a:r>
             <a:endParaRPr lang="en-US" sz="2000" dirty="0"/>
           </a:p>
@@ -11646,7 +11646,7 @@
                 <a:ea typeface="Calibri" pitchFamily="34" charset="-122"/>
                 <a:cs typeface="Calibri" pitchFamily="34" charset="-120"/>
               </a:rPr>
-              <a:t>Gold and diamonds from India</a:t>
+              <a:t>Guns, cloth and other manufactured goods</a:t>
             </a:r>
             <a:endParaRPr lang="en-US" sz="2000" dirty="0"/>
           </a:p>
@@ -11850,7 +11850,7 @@
                 <a:ea typeface="Calibri" pitchFamily="34" charset="-122"/>
                 <a:cs typeface="Calibri" pitchFamily="34" charset="-120"/>
               </a:rPr>
-              <a:t>Liverpool</a:t>
+              <a:t>Bristol</a:t>
             </a:r>
             <a:endParaRPr lang="en-US" sz="2400" dirty="0"/>
           </a:p>
@@ -11887,7 +11887,7 @@
                 <a:ea typeface="Calibri" pitchFamily="34" charset="-122"/>
                 <a:cs typeface="Calibri" pitchFamily="34" charset="-120"/>
               </a:rPr>
-              <a:t>London</a:t>
+              <a:t>Liverpool</a:t>
             </a:r>
             <a:endParaRPr lang="en-US" sz="2400" dirty="0"/>
           </a:p>
@@ -11924,7 +11924,7 @@
                 <a:ea typeface="Calibri" pitchFamily="34" charset="-122"/>
                 <a:cs typeface="Calibri" pitchFamily="34" charset="-120"/>
               </a:rPr>
-              <a:t>Bristol</a:t>
+              <a:t>London</a:t>
             </a:r>
             <a:endParaRPr lang="en-US" sz="2400" dirty="0"/>
           </a:p>
@@ -12612,7 +12612,7 @@
                 <a:ea typeface="Calibri" pitchFamily="34" charset="-122"/>
                 <a:cs typeface="Calibri" pitchFamily="34" charset="-120"/>
               </a:rPr>
-              <a:t>A   Guns, cloth and other manufactured goods</a:t>
+              <a:t>D   Guns, cloth and other manufactured goods</a:t>
             </a:r>
             <a:endParaRPr lang="en-US" sz="2200" dirty="0"/>
           </a:p>
@@ -12842,7 +12842,7 @@
                 <a:ea typeface="Calibri" pitchFamily="34" charset="-122"/>
                 <a:cs typeface="Calibri" pitchFamily="34" charset="-120"/>
               </a:rPr>
-              <a:t>A   Liverpool</a:t>
+              <a:t>B   Liverpool</a:t>
             </a:r>
             <a:endParaRPr lang="en-US" sz="2200" dirty="0"/>
           </a:p>

--- a/decks/hist-slave-trade/hist-slave-trade_ch2_triangle.pptx
+++ b/decks/hist-slave-trade/hist-slave-trade_ch2_triangle.pptx
@@ -125,30 +125,30 @@
   <p:extLst>
     <p:ext uri="{521415D9-36F7-43E2-AB2F-B90AF26B5E84}">
       <p14:sectionLst xmlns:p14="http://schemas.microsoft.com/office/powerpoint/2010/main">
-        <p14:section name="Opening" id="{bc24c6fa-8c4c-21eb-6558-4178f5e65c25}">
+        <p14:section name="Opening" id="{1b9ec525-aaa2-40fd-a07b-91a2f420d21b}">
           <p14:sldIdLst>
             <p14:sldId id="256"/>
           </p14:sldIdLst>
         </p14:section>
-        <p14:section name="Gate" id="{b4e61d27-28f8-fb91-5f35-7230249b9c33}">
+        <p14:section name="Gate" id="{2b88c860-4dd7-6482-cd5f-ee42f5e52c2d}">
           <p14:sldIdLst>
             <p14:sldId id="257"/>
             <p14:sldId id="258"/>
           </p14:sldIdLst>
         </p14:section>
-        <p14:section name="Pre-teach" id="{c5090899-8409-618c-8728-d3312cbc3fba}">
+        <p14:section name="Pre-teach" id="{a0e680f5-bb08-1a5b-0c20-98a5e977cfd4}">
           <p14:sldIdLst>
             <p14:sldId id="259"/>
             <p14:sldId id="260"/>
           </p14:sldIdLst>
         </p14:section>
-        <p14:section name="Read-along" id="{65fb9cf0-27aa-5747-2804-a03fd16dd3d4}">
+        <p14:section name="Read-along" id="{e074f15c-211c-dbcf-97ad-5f01ca7356af}">
           <p14:sldIdLst>
             <p14:sldId id="261"/>
             <p14:sldId id="262"/>
           </p14:sldIdLst>
         </p14:section>
-        <p14:section name="Teach" id="{8a664b66-8590-cd62-2714-ab7d04e39f25}">
+        <p14:section name="Teach" id="{a68e8050-bda8-2f6d-ca27-5ade86a89c43}">
           <p14:sldIdLst>
             <p14:sldId id="263"/>
             <p14:sldId id="264"/>
@@ -156,7 +156,7 @@
             <p14:sldId id="266"/>
           </p14:sldIdLst>
         </p14:section>
-        <p14:section name="Routes" id="{31d57922-43b2-70f1-5036-6645072acd02}">
+        <p14:section name="Routes" id="{af158127-93f1-60c4-4a3e-34d769131e9b}">
           <p14:sldIdLst>
             <p14:sldId id="267"/>
             <p14:sldId id="268"/>
@@ -164,12 +164,12 @@
             <p14:sldId id="270"/>
           </p14:sldIdLst>
         </p14:section>
-        <p14:section name="Close" id="{37e8d6b7-0e0f-0f69-d7ef-c31eb3fdd5dc}">
+        <p14:section name="Close" id="{3521a363-394e-463b-16c2-2c2c3a2b60f4}">
           <p14:sldIdLst>
             <p14:sldId id="271"/>
           </p14:sldIdLst>
         </p14:section>
-        <p14:section name="Answers" id="{9749ea69-c9d7-4390-3fd7-d8e51f5cb6d6}">
+        <p14:section name="Answers" id="{8c3a86d0-3ad2-4e47-3d82-301bbb74c29e}">
           <p14:sldIdLst>
             <p14:sldId id="272"/>
             <p14:sldId id="273"/>
